--- a/assets/powerpoints/module-n2-autobus/A2-entendre-l-heure.pptx
+++ b/assets/powerpoints/module-n2-autobus/A2-entendre-l-heure.pptx
@@ -8733,13 +8733,58 @@
               </a:lnSpc>
             </a:pPr>
             <a:r>
-              <a:rPr sz="2000" b="0" i="0">
+              <a:rPr sz="2000" b="1" i="0">
                 <a:solidFill>
                   <a:srgbClr val="4B4F52"/>
                 </a:solidFill>
                 <a:latin typeface="Verdana"/>
               </a:rPr>
-              <a:t>&lt;b&gt;Et quart&lt;/b&gt; = 15 minutes. &lt;b&gt;Et demie&lt;/b&gt; = 30 minutes. &lt;b&gt;Moins le quart&lt;/b&gt; = 45 minutes, sur l'heure suivante.</a:t>
+              <a:t>Et quart</a:t>
+            </a:r>
+            <a:r>
+              <a:rPr sz="2000" b="0" i="0">
+                <a:solidFill>
+                  <a:srgbClr val="4B4F52"/>
+                </a:solidFill>
+                <a:latin typeface="Verdana"/>
+              </a:rPr>
+              <a:t> = 15 minutes. </a:t>
+            </a:r>
+            <a:r>
+              <a:rPr sz="2000" b="1" i="0">
+                <a:solidFill>
+                  <a:srgbClr val="4B4F52"/>
+                </a:solidFill>
+                <a:latin typeface="Verdana"/>
+              </a:rPr>
+              <a:t>Et demie</a:t>
+            </a:r>
+            <a:r>
+              <a:rPr sz="2000" b="0" i="0">
+                <a:solidFill>
+                  <a:srgbClr val="4B4F52"/>
+                </a:solidFill>
+                <a:latin typeface="Verdana"/>
+              </a:rPr>
+              <a:t> = 30 minutes. </a:t>
+            </a:r>
+            <a:r>
+              <a:rPr sz="2000" b="1" i="0">
+                <a:solidFill>
+                  <a:srgbClr val="4B4F52"/>
+                </a:solidFill>
+                <a:latin typeface="Verdana"/>
+              </a:rPr>
+              <a:t>Moins le quart</a:t>
+            </a:r>
+            <a:r>
+              <a:rPr sz="2000" b="0" i="0">
+                <a:solidFill>
+                  <a:srgbClr val="4B4F52"/>
+                </a:solidFill>
+                <a:latin typeface="Verdana"/>
+              </a:rPr>
+              <a:t> = 45 minutes, sur l'heure suivante.</a:t>
             </a:r>
           </a:p>
         </p:txBody>
@@ -9288,7 +9333,25 @@
                 </a:solidFill>
                 <a:latin typeface="Verdana"/>
               </a:rPr>
-              <a:t>Pour 8 h 45, on annonce l'heure &lt;b&gt;qui vient&lt;/b&gt;, pas celle qu'on quitte. C'est l'erreur la plus fréquente, et elle fait manquer l'autobus d'une heure.</a:t>
+              <a:t>Pour 8 h 45, on annonce l'heure </a:t>
+            </a:r>
+            <a:r>
+              <a:rPr sz="2000" b="1" i="0">
+                <a:solidFill>
+                  <a:srgbClr val="4B4F52"/>
+                </a:solidFill>
+                <a:latin typeface="Verdana"/>
+              </a:rPr>
+              <a:t>qui vient</a:t>
+            </a:r>
+            <a:r>
+              <a:rPr sz="2000" b="0" i="0">
+                <a:solidFill>
+                  <a:srgbClr val="4B4F52"/>
+                </a:solidFill>
+                <a:latin typeface="Verdana"/>
+              </a:rPr>
+              <a:t>, pas celle qu'on quitte. C'est l'erreur la plus fréquente, et elle fait manquer l'autobus d'une heure.</a:t>
             </a:r>
           </a:p>
         </p:txBody>
